--- a/docs/fc/demo-day/Sage-DemoDay.pptx
+++ b/docs/fc/demo-day/Sage-DemoDay.pptx
@@ -114,38 +114,38 @@
   <p:extLst>
     <p:ext uri="{521415D9-36F7-43E2-AB2F-B90AF26B5E84}">
       <p14:sectionLst xmlns:p14="http://schemas.microsoft.com/office/powerpoint/2010/main">
-        <p14:section name="Opening" id="{01c5cb19-b6eb-357f-a9df-3b17117a2c51}">
+        <p14:section name="Opening" id="{a43ef30d-9754-9402-f1fd-acf493c1fc9d}">
           <p14:sldIdLst>
             <p14:sldId id="256"/>
           </p14:sldIdLst>
         </p14:section>
-        <p14:section name="Problem" id="{75a02dc2-7673-baf8-7cb3-9c5937eac568}">
+        <p14:section name="Problem" id="{ef6585ab-bbcd-269c-f26b-e2e0faa2342c}">
           <p14:sldIdLst>
             <p14:sldId id="257"/>
           </p14:sldIdLst>
         </p14:section>
-        <p14:section name="Sage" id="{913cd342-e1ca-1f23-a72c-011e7818e230}">
+        <p14:section name="Sage" id="{49c53a44-6f25-2972-57f4-cdac75a520f3}">
           <p14:sldIdLst>
             <p14:sldId id="258"/>
           </p14:sldIdLst>
         </p14:section>
-        <p14:section name="Live" id="{386f22df-f14b-f1f6-17fa-391b8a5597d6}">
+        <p14:section name="Live" id="{be4833a6-ebf1-8faa-7f96-6e483bf43550}">
           <p14:sldIdLst>
             <p14:sldId id="259"/>
           </p14:sldIdLst>
         </p14:section>
-        <p14:section name="Finance" id="{e1e7efa0-0a54-4eef-e542-c3b0cf42b012}">
+        <p14:section name="Finance" id="{2f841590-d193-3122-e19a-540cc189e025}">
           <p14:sldIdLst>
             <p14:sldId id="260"/>
           </p14:sldIdLst>
         </p14:section>
-        <p14:section name="Next" id="{34644bf3-f528-85fd-868d-4ef278da8a64}">
+        <p14:section name="Next" id="{a3cfa9e4-916d-5782-993b-b31e1ccd508a}">
           <p14:sldIdLst>
             <p14:sldId id="261"/>
             <p14:sldId id="262"/>
           </p14:sldIdLst>
         </p14:section>
-        <p14:section name="Close" id="{6d4563b7-76ea-8f05-1966-96584255ff47}">
+        <p14:section name="Close" id="{ae6cd12b-68f2-8ee9-6238-f6ee0ce7e436}">
           <p14:sldIdLst>
             <p14:sldId id="263"/>
           </p14:sldIdLst>
@@ -556,7 +556,7 @@
               <a:rPr lang="en-US" dirty="0"/>
               <a:t>1 · OPENING (to 0:15). Learn these three lines by heart.
 Hi, I'm Shariq, and I built Sage.
-In the next few minutes I'll post a job, and an AI agent will check the work and pay for it. Live. Nobody will approve that payment, not even me.
+In the next few minutes I'll post a job, and an AI agent will check the work and pay for it. Live, with real money. Nobody will approve that payment, not even me.
 But first, why it matters here.</a:t>
             </a:r>
             <a:endParaRPr lang="en-US" dirty="0"/>
@@ -827,7 +827,7 @@
             <a:r>
               <a:rPr lang="en-US" dirty="0"/>
               <a:t>4 · LIVE (to 1:15)
-Let me show you. Live, on Arc's test network, so these are test dollars. The same engine pays real money on mainnet.
+Let me show you. Live, with real money, on Arc, where the dollar pays its own fee.
 &gt;&gt; CMD+TAB TO CHROME: THE BUYER'S WINDOW, ON SAGEPAYS.XYZ, ALREADY SIGNED IN.
 CHROME · BUYER · POST THE JOB (to 1:55)
 I'm the buyer. I write what I want in one sentence, in my own money: put my shop's price list online, three items in Jamaican dollars, J$160.
@@ -836,7 +836,7 @@
 &gt;&gt; WHEN THE FORM FILLS, POINT AT THE RULES AND THE PRICE. TICK "ONLY PEOPLE I INVITE". CLICK "CREATE THE GIG".
 CHROME · BUYER · LAUNCH IT (to 2:15)
 Now I fund it. I don't send money to anyone. Sage creates a vault on chain, funds it from my account, and switches it on.
-&gt;&gt; CLICK "LET SAGE LAUNCH IT FROM YOUR ACCOUNT ON ARC TESTNET".
+&gt;&gt; CLICK "LET SAGE LAUNCH IT FROM YOUR ACCOUNT ON ARC MAINNET".
 Live. The vault holds exactly the reward, and Sage can't pay a cent more.
 &gt;&gt; CLICK "THE BOARD". COPY THE ADDRESS: CMD+L, CMD+C.
 CHROME · SELLER · DO THE WORK (to 2:35)
@@ -1959,7 +1959,7 @@
         <p:spPr>
           <a:xfrm>
             <a:off x="685800" y="4389120"/>
-            <a:ext cx="7863840" cy="713232"/>
+            <a:ext cx="9418320" cy="713232"/>
           </a:xfrm>
           <a:prstGeom prst="roundRect">
             <a:avLst>
@@ -2011,7 +2011,7 @@
         <p:spPr>
           <a:xfrm>
             <a:off x="1371600" y="4389120"/>
-            <a:ext cx="7040880" cy="713232"/>
+            <a:ext cx="8412480" cy="713232"/>
           </a:xfrm>
           <a:prstGeom prst="rect">
             <a:avLst/>
@@ -2035,7 +2035,7 @@
                 <a:ea typeface="Arial" pitchFamily="34" charset="-122"/>
                 <a:cs typeface="Arial" pitchFamily="34" charset="-120"/>
               </a:rPr>
-              <a:t>In the next few minutes, you'll watch it pay someone. Live.</a:t>
+              <a:t>In the next few minutes, you'll watch it pay someone. Live, with real money.</a:t>
             </a:r>
             <a:endParaRPr lang="en-US" sz="2000" dirty="0"/>
           </a:p>
@@ -3584,7 +3584,7 @@
                 <a:ea typeface="Arial" pitchFamily="34" charset="-122"/>
                 <a:cs typeface="Arial" pitchFamily="34" charset="-120"/>
               </a:rPr>
-              <a:t>Read from the public ledger at sagepays.xyz/explorer, 9 Oct 2026</a:t>
+              <a:t>Read from the public ledger at sagepays.xyz/explorer, 10 Oct 2026</a:t>
             </a:r>
             <a:endParaRPr lang="en-US" sz="1100" dirty="0"/>
           </a:p>
@@ -4293,7 +4293,7 @@
                 <a:ea typeface="Arial" pitchFamily="34" charset="-122"/>
                 <a:cs typeface="Arial" pitchFamily="34" charset="-120"/>
               </a:rPr>
-              <a:t>On Arc's test network: test dollars, the real engine. Real money since July: 41 mainnet payments on the public ledger.</a:t>
+              <a:t>Real USDC on Arc mainnet. Every payment is a public transaction. 41 mainnet payments since July.</a:t>
             </a:r>
             <a:endParaRPr lang="en-US" sz="1400" dirty="0"/>
           </a:p>

--- a/docs/fc/demo-day/Sage-DemoDay.pptx
+++ b/docs/fc/demo-day/Sage-DemoDay.pptx
@@ -114,38 +114,38 @@
   <p:extLst>
     <p:ext uri="{521415D9-36F7-43E2-AB2F-B90AF26B5E84}">
       <p14:sectionLst xmlns:p14="http://schemas.microsoft.com/office/powerpoint/2010/main">
-        <p14:section name="Opening" id="{a43ef30d-9754-9402-f1fd-acf493c1fc9d}">
+        <p14:section name="Opening" id="{6c463ca9-4103-c671-654c-39612a0ccf85}">
           <p14:sldIdLst>
             <p14:sldId id="256"/>
           </p14:sldIdLst>
         </p14:section>
-        <p14:section name="Problem" id="{ef6585ab-bbcd-269c-f26b-e2e0faa2342c}">
+        <p14:section name="Problem" id="{4d4589ea-73e1-4805-6e18-8f42ffbc5e65}">
           <p14:sldIdLst>
             <p14:sldId id="257"/>
           </p14:sldIdLst>
         </p14:section>
-        <p14:section name="Sage" id="{49c53a44-6f25-2972-57f4-cdac75a520f3}">
+        <p14:section name="Sage" id="{3ce3d858-7475-a6c8-e623-36c8536a91be}">
           <p14:sldIdLst>
             <p14:sldId id="258"/>
           </p14:sldIdLst>
         </p14:section>
-        <p14:section name="Live" id="{be4833a6-ebf1-8faa-7f96-6e483bf43550}">
+        <p14:section name="Live" id="{134f0a95-608f-5fa4-3cff-3ad42bd1df8f}">
           <p14:sldIdLst>
             <p14:sldId id="259"/>
           </p14:sldIdLst>
         </p14:section>
-        <p14:section name="Finance" id="{2f841590-d193-3122-e19a-540cc189e025}">
+        <p14:section name="Finance" id="{61eb47f5-fe33-93ed-dd16-55feaeec417a}">
           <p14:sldIdLst>
             <p14:sldId id="260"/>
           </p14:sldIdLst>
         </p14:section>
-        <p14:section name="Next" id="{a3cfa9e4-916d-5782-993b-b31e1ccd508a}">
+        <p14:section name="Next" id="{69e0f1e1-fcc7-d18b-1a31-843ed6003a30}">
           <p14:sldIdLst>
             <p14:sldId id="261"/>
             <p14:sldId id="262"/>
           </p14:sldIdLst>
         </p14:section>
-        <p14:section name="Close" id="{ae6cd12b-68f2-8ee9-6238-f6ee0ce7e436}">
+        <p14:section name="Close" id="{929d4c3a-bad7-27a3-e8bf-8d04f372a12e}">
           <p14:sldIdLst>
             <p14:sldId id="263"/>
           </p14:sldIdLst>
@@ -829,26 +829,28 @@
               <a:t>4 · LIVE (to 1:15)
 Let me show you. Live, with real money, on Arc, where the dollar pays its own fee.
 &gt;&gt; CMD+TAB TO CHROME: THE BUYER'S WINDOW, ON SAGEPAYS.XYZ, ALREADY SIGNED IN.
-CHROME · BUYER · POST THE JOB (to 1:55)
+CHROME · BUYER · POST THE JOB (to 2:10)
 I'm the buyer. I write what I want in one sentence, in my own money: put my shop's price list online, three items in Jamaican dollars, J$160.
 &gt;&gt; CLICK "DRAFT WITH SAGE".
 Sage is turning that sentence into a real job: the steps, what must be true when it's done, and what counts as proof. Those are the rules it will judge by.
+No forms, no categories. And one thing it never does: set the price. The money is mine to set.
 &gt;&gt; WHEN THE FORM FILLS, POINT AT THE RULES AND THE PRICE. TICK "ONLY PEOPLE I INVITE". CLICK "CREATE THE GIG".
-CHROME · BUYER · LAUNCH IT (to 2:15)
+CHROME · BUYER · LAUNCH IT (to 2:30)
 Now I fund it. I don't send money to anyone. Sage creates a vault on chain, funds it from my account, and switches it on.
-&gt;&gt; CLICK "LET SAGE LAUNCH IT FROM YOUR ACCOUNT ON ARC MAINNET".
+&gt;&gt; CLICK "LET SAGE LAUNCH IT FROM YOUR ACCOUNT ON ARC".
 Live. The vault holds exactly the reward, and Sage can't pay a cent more.
 &gt;&gt; CLICK "THE BOARD". COPY THE ADDRESS: CMD+L, CMD+C.
-CHROME · SELLER · DO THE WORK (to 2:35)
+CHROME · SELLER · DO THE WORK (to 2:50)
 &gt;&gt; SWITCH TO THE SELLER'S WINDOW (CMD+`). PASTE THE ADDRESS: CMD+L, CMD+V, ENTER.
 Now I'm the seller, a different person with my own wallet. I've already put my price list online.
 &gt;&gt; CLICK "SUBMIT EVIDENCE". TYPE THE SHOP LINK. CLICK "SIGN + SUBMIT EVIDENCE".
 Submitted.
-CHROME · SELLER · SAGE DECIDES (to 3:25). The money moment. Slow down.
+CHROME · SELLER · SAGE DECIDES (to 4:05). The money moment. Slow down. Paid takes about a minute.
 &gt;&gt; SCROLL DOWN TO "SAGE ACTIVITY".
 Watch. Sage is opening my page itself, not trusting my word.
 It checks every rule the buyer set: three items, prices in J-dollars, the shop's name, and my wallet on the page, so nobody else can claim my work.
 It has to quote the exact words it relied on. And it can say no: it has refused 26 times so far, every time with the reason written down.
+And the money isn't with Sage. It's in the vault the buyer funded. The vault decides the amount; Sage can only say yes or no.
 &gt;&gt; IF IT IS STILL CHECKING, SAY NOTHING. SILENCE WHILE THE ROOM WATCHES IS FINE.
 &gt;&gt; WHEN IT SAYS PAID: STOP TALKING FOR TWO SECONDS.
 Paid. Nobody approved that. Not me, not anyone.
@@ -856,8 +858,8 @@
 Here's the receipt: the decision, how sure it was, and the exact words from my page. Anyone in this room can open it.
 &gt;&gt; CMD+TAB TO KEYNOTE. PRESS →.
 IF IT STALLS:
-- Drafting takes over 60 seconds, or launch fails: "Here's the same job, posted this morning." Open the buyer's second tab (the backup job), copy its address, and carry on from the seller step.
-- No Paid after 60 seconds: "It's checking on chain. Here's the one I ran an hour ago." Cmd+Tab to Keynote and →. The next slide shows that receipt.
+- Drafting takes over 75 seconds, or launch fails: "Here's the same job, posted this morning." Open the buyer's second tab (the backup job), copy its address, and carry on from the seller step.
+- No Paid after 90 seconds: "It's still checking. Here's the one I ran earlier today." Cmd+Tab to Keynote and →. The next slide shows that receipt.
 - It says Held: "It held this one for a person to check. That's the guard working: it would rather wait than pay for weak proof." Cmd+Tab and →.</a:t>
             </a:r>
             <a:endParaRPr lang="en-US" dirty="0"/>
@@ -946,9 +948,9 @@
           <a:p>
             <a:r>
               <a:rPr lang="en-US" dirty="0"/>
-              <a:t>5 · RECEIPT AND RECORD (to 3:50). Works whether the live run paid or stalled.
+              <a:t>5 · RECEIPT AND RECORD (to 4:30). Works whether the live run paid or stalled.
 If it paid live: "That's the receipt you just saw, and that payment just became a line in my record."
-If it stalled: "Here's the receipt from the run an hour ago, and the record it became."
+If it stalled: "Here's the receipt from the run earlier today, and the record it became."
 Verified income over thirty and ninety days, who paid me and for how long, how often my work passes. Published formulas over real receipts, not a black-box score. A lender reads it in one call.</a:t>
             </a:r>
             <a:endParaRPr lang="en-US" dirty="0"/>
@@ -1037,7 +1039,7 @@
           <a:p>
             <a:r>
               <a:rPr lang="en-US" dirty="0"/>
-              <a:t>6 · NEXT (to 4:15)
+              <a:t>6 · NEXT (to 4:50)
 Now imagine where this goes. Next, you won't even post the job: you give Sage a goal and a budget, and it decides what to buy and tells you why before it spends.
 Every small business gets an AI finance worker that pays on proof and turns every job into credit. After a hurricane, a programme could pay a thousand people for verified clean-up in minutes.</a:t>
             </a:r>
@@ -1127,7 +1129,7 @@
           <a:p>
             <a:r>
               <a:rPr lang="en-US" dirty="0"/>
-              <a:t>7 · THE ASK (to 4:30)
+              <a:t>7 · THE ASK (to 5:05)
 The engine is live. It needs the institutions it was built for: an MSME programme, a cooperative, and a lender who'd price verified cash flow instead of collateral. Twenty minutes with any of you is our next milestone.
 &gt;&gt; PRESS → FOR THE LAST SLIDE.</a:t>
             </a:r>
@@ -1217,7 +1219,7 @@
           <a:p>
             <a:r>
               <a:rPr lang="en-US" dirty="0"/>
-              <a:t>8 · CLOSE (to 4:35)
+              <a:t>8 · CLOSE (to 5:10)
 Sage. Payments that verify themselves. Credit records that write themselves. Thank you.
 &gt;&gt; THEN STOP TALKING.</a:t>
             </a:r>
@@ -3272,7 +3274,7 @@
                 <a:ea typeface="Arial" pitchFamily="34" charset="-122"/>
                 <a:cs typeface="Arial" pitchFamily="34" charset="-120"/>
               </a:rPr>
-              <a:t>$73.71</a:t>
+              <a:t>$76.23</a:t>
             </a:r>
             <a:endParaRPr lang="en-US" sz="2600" dirty="0"/>
           </a:p>
@@ -3350,7 +3352,7 @@
                 <a:ea typeface="Arial" pitchFamily="34" charset="-122"/>
                 <a:cs typeface="Arial" pitchFamily="34" charset="-120"/>
               </a:rPr>
-              <a:t>41</a:t>
+              <a:t>44</a:t>
             </a:r>
             <a:endParaRPr lang="en-US" sz="2600" dirty="0"/>
           </a:p>
@@ -3428,7 +3430,7 @@
                 <a:ea typeface="Arial" pitchFamily="34" charset="-122"/>
                 <a:cs typeface="Arial" pitchFamily="34" charset="-120"/>
               </a:rPr>
-              <a:t>24</a:t>
+              <a:t>25</a:t>
             </a:r>
             <a:endParaRPr lang="en-US" sz="2600" dirty="0"/>
           </a:p>
@@ -4293,7 +4295,7 @@
                 <a:ea typeface="Arial" pitchFamily="34" charset="-122"/>
                 <a:cs typeface="Arial" pitchFamily="34" charset="-120"/>
               </a:rPr>
-              <a:t>Real USDC on Arc mainnet. Every payment is a public transaction. 41 mainnet payments since July.</a:t>
+              <a:t>Real USDC on Arc mainnet. Every payment is a public transaction. 44 mainnet payments since July.</a:t>
             </a:r>
             <a:endParaRPr lang="en-US" sz="1400" dirty="0"/>
           </a:p>

--- a/docs/fc/demo-day/Sage-DemoDay.pptx
+++ b/docs/fc/demo-day/Sage-DemoDay.pptx
@@ -114,38 +114,38 @@
   <p:extLst>
     <p:ext uri="{521415D9-36F7-43E2-AB2F-B90AF26B5E84}">
       <p14:sectionLst xmlns:p14="http://schemas.microsoft.com/office/powerpoint/2010/main">
-        <p14:section name="Opening" id="{6c463ca9-4103-c671-654c-39612a0ccf85}">
+        <p14:section name="Opening" id="{ae565b24-7cf7-0120-b693-aed180c791e5}">
           <p14:sldIdLst>
             <p14:sldId id="256"/>
           </p14:sldIdLst>
         </p14:section>
-        <p14:section name="Problem" id="{4d4589ea-73e1-4805-6e18-8f42ffbc5e65}">
+        <p14:section name="Problem" id="{c637d14a-8296-0729-6a05-6497ae891e26}">
           <p14:sldIdLst>
             <p14:sldId id="257"/>
           </p14:sldIdLst>
         </p14:section>
-        <p14:section name="Sage" id="{3ce3d858-7475-a6c8-e623-36c8536a91be}">
+        <p14:section name="Sage" id="{1d8d99f1-4be4-3b68-162c-a54897e8fd96}">
           <p14:sldIdLst>
             <p14:sldId id="258"/>
           </p14:sldIdLst>
         </p14:section>
-        <p14:section name="Live" id="{134f0a95-608f-5fa4-3cff-3ad42bd1df8f}">
+        <p14:section name="Live" id="{07733bff-dc58-0fd2-6c04-5502ab1b938f}">
           <p14:sldIdLst>
             <p14:sldId id="259"/>
           </p14:sldIdLst>
         </p14:section>
-        <p14:section name="Finance" id="{61eb47f5-fe33-93ed-dd16-55feaeec417a}">
+        <p14:section name="Finance" id="{b6b55d1f-af14-c282-5819-72615853658a}">
           <p14:sldIdLst>
             <p14:sldId id="260"/>
           </p14:sldIdLst>
         </p14:section>
-        <p14:section name="Next" id="{69e0f1e1-fcc7-d18b-1a31-843ed6003a30}">
+        <p14:section name="Next" id="{87c2800b-68f8-36f0-f2fa-7f36f22db2c4}">
           <p14:sldIdLst>
             <p14:sldId id="261"/>
             <p14:sldId id="262"/>
           </p14:sldIdLst>
         </p14:section>
-        <p14:section name="Close" id="{929d4c3a-bad7-27a3-e8bf-8d04f372a12e}">
+        <p14:section name="Close" id="{13b9d080-29eb-c7c1-5491-482d1ae8fd3d}">
           <p14:sldIdLst>
             <p14:sldId id="263"/>
           </p14:sldIdLst>
@@ -3274,7 +3274,7 @@
                 <a:ea typeface="Arial" pitchFamily="34" charset="-122"/>
                 <a:cs typeface="Arial" pitchFamily="34" charset="-120"/>
               </a:rPr>
-              <a:t>$76.23</a:t>
+              <a:t>$76.48</a:t>
             </a:r>
             <a:endParaRPr lang="en-US" sz="2600" dirty="0"/>
           </a:p>
@@ -3352,7 +3352,7 @@
                 <a:ea typeface="Arial" pitchFamily="34" charset="-122"/>
                 <a:cs typeface="Arial" pitchFamily="34" charset="-120"/>
               </a:rPr>
-              <a:t>44</a:t>
+              <a:t>45</a:t>
             </a:r>
             <a:endParaRPr lang="en-US" sz="2600" dirty="0"/>
           </a:p>
@@ -4295,7 +4295,7 @@
                 <a:ea typeface="Arial" pitchFamily="34" charset="-122"/>
                 <a:cs typeface="Arial" pitchFamily="34" charset="-120"/>
               </a:rPr>
-              <a:t>Real USDC on Arc mainnet. Every payment is a public transaction. 44 mainnet payments since July.</a:t>
+              <a:t>Real USDC on Arc mainnet. Every payment is a public transaction. 45 mainnet payments since July.</a:t>
             </a:r>
             <a:endParaRPr lang="en-US" sz="1400" dirty="0"/>
           </a:p>
@@ -4455,7 +4455,7 @@
                 <a:ea typeface="Arial" pitchFamily="34" charset="-122"/>
                 <a:cs typeface="Arial" pitchFamily="34" charset="-120"/>
               </a:rPr>
-              <a:t>The decision Sage recorded on a rehearsal run</a:t>
+              <a:t>The decision Sage recorded on a real-money rehearsal (Arc mainnet)</a:t>
             </a:r>
             <a:endParaRPr lang="en-US" sz="1100" dirty="0"/>
           </a:p>
